--- a/classes/parte-5-ingenieria-de-datos/215-modelado-dimensional-star-snowflake-schemas/clase-215-modelado-dimensional-star-snowflake-schemas-presentacion.pptx
+++ b/classes/parte-5-ingenieria-de-datos/215-modelado-dimensional-star-snowflake-schemas/clase-215-modelado-dimensional-star-snowflake-schemas-presentacion.pptx
@@ -3272,7 +3272,7 @@
                 </a:solidFill>
                 <a:latin typeface="Segoe UI"/>
               </a:rPr>
-              <a:t>Parte: 5 — Ingeniería de Datos · Fuente: Kimball &amp; Ross The Data Warehouse Toolkit (Wiley, 3ª ed.) + Reis &amp; Housley cap. 8.  Duración estimada: 75 min.</a:t>
+              <a:t>Parte: 5 — Ingeniería de Datos · Fuente: Kimball &amp; Ross The Data Warehouse Toolkit (Wiley, 3ª ed.) + Reis &amp; Housley cap. 8.  Duración estimada: 75 min. · Nivel: Intermedio-Avanzado</a:t>
             </a:r>
           </a:p>
         </p:txBody>
@@ -3581,7 +3581,7 @@
                 </a:solidFill>
                 <a:latin typeface="Segoe UI"/>
               </a:rPr>
-              <a:t>Parte: 5 — Ingeniería de Datos · Fuente: Kimball &amp; Ross The Data Warehouse Toolkit (Wiley, 3ª ed.) + Reis &amp; Housley cap. 8.  Duración estimada: 75 min.</a:t>
+              <a:t>Parte: 5 — Ingeniería de Datos · Fuente: Kimball &amp; Ross The Data Warehouse Toolkit (Wiley, 3ª ed.) + Reis &amp; Housley cap. 8.  Duración estimada: 75 min. · Nivel: Intermedio-Avanzado</a:t>
             </a:r>
           </a:p>
         </p:txBody>
@@ -6291,7 +6291,7 @@
                 </a:solidFill>
                 <a:latin typeface="Segoe UI Semibold"/>
               </a:rPr>
-              <a:t>Clase 216 — Recommender systems: visión general</a:t>
+              <a:t>Clase 216 — Filtrado colaborativo: user-based e item-based</a:t>
             </a:r>
           </a:p>
         </p:txBody>
